--- a/courses/learn_yosys/module99-00-wrap/slides.pptx
+++ b/courses/learn_yosys/module99-00-wrap/slides.pptx
@@ -10,7 +10,6 @@
     <p:sldId id="258" r:id="rId10"/>
     <p:sldId id="259" r:id="rId11"/>
     <p:sldId id="260" r:id="rId12"/>
-    <p:sldId id="261" r:id="rId13"/>
   </p:sldIdLst>
   <p:sldSz cx="12191695" cy="6858000" type="screen4x3"/>
   <p:notesSz cx="6858000" cy="9144000"/>
@@ -507,7 +506,7 @@
           <a:lstStyle/>
           <a:p>
             <a:r>
-              <a:t>You checked tiny_yosys: 6 RTL cells; flatten→1; opt→5; strash→4; rewrite→3; nand 6/7; report 7/11; engine ok.</a:t>
+              <a:t>You finished Part A pass map, Part B real Yosys evidence on tiny_and_or.v, and Part C algorithms bound to real Yosys.</a:t>
             </a:r>
           </a:p>
         </p:txBody>
@@ -577,7 +576,7 @@
           <a:lstStyle/>
           <a:p>
             <a:r>
-              <a:t>Natural next: learn_openroad (place/route evidence).</a:t>
+              <a:t>You can name the pass map, run real Yosys scripts, and explain the algorithms behind proc, opt, techmap, extract, memory, fsm, and ABC handoff.</a:t>
             </a:r>
           </a:p>
         </p:txBody>
@@ -647,7 +646,7 @@
           <a:lstStyle/>
           <a:p>
             <a:r>
-              <a:t>Recap proc, flatten, opt, strash, rewrite, techmap, synth, engine.</a:t>
+              <a:t>Checked-in logs and goldens under common/logs and common/evidence — including Part C partc/ — prove the real binary path.</a:t>
             </a:r>
           </a:p>
         </p:txBody>
@@ -717,7 +716,7 @@
           <a:lstStyle/>
           <a:p>
             <a:r>
-              <a:t>6 RTL cells; flatten→1; opt→5; strash→4; rewrite→3; nand 6/7; report 7/11; engine ok.</a:t>
+              <a:t>Pass-map labs teach the pass order. Real modules teach the CLI, RTLIL, and evidence. Algorithm labs teach the moves and bind them to Yosys.</a:t>
             </a:r>
           </a:p>
         </p:txBody>
@@ -787,77 +786,7 @@
           <a:lstStyle/>
           <a:p>
             <a:r>
-              <a:t>Natural next: learn_openroad (place/route evidence).</a:t>
-            </a:r>
-          </a:p>
-        </p:txBody>
-      </p:sp>
-      <p:sp>
-        <p:nvSpPr>
-          <p:cNvPr id="4" name="Slide Number Placeholder 3"/>
-          <p:cNvSpPr>
-            <a:spLocks noGrp="1"/>
-          </p:cNvSpPr>
-          <p:nvPr>
-            <p:ph type="sldNum" idx="5" sz="quarter"/>
-          </p:nvPr>
-        </p:nvSpPr>
-        <p:spPr/>
-      </p:sp>
-    </p:spTree>
-  </p:cSld>
-  <p:clrMapOvr>
-    <a:masterClrMapping/>
-  </p:clrMapOvr>
-</p:notes>
-</file>
-
-<file path=ppt/notesSlides/notesSlide6.xml><?xml version="1.0" encoding="utf-8"?>
-<p:notes xmlns:a="http://schemas.openxmlformats.org/drawingml/2006/main" xmlns:p="http://schemas.openxmlformats.org/presentationml/2006/main" xmlns:r="http://schemas.openxmlformats.org/officeDocument/2006/relationships">
-  <p:cSld>
-    <p:spTree>
-      <p:nvGrpSpPr>
-        <p:cNvPr id="1" name=""/>
-        <p:cNvGrpSpPr/>
-        <p:nvPr/>
-      </p:nvGrpSpPr>
-      <p:grpSpPr>
-        <a:xfrm>
-          <a:off x="0" y="0"/>
-          <a:ext cx="0" cy="0"/>
-          <a:chOff x="0" y="0"/>
-          <a:chExt cx="0" cy="0"/>
-        </a:xfrm>
-      </p:grpSpPr>
-      <p:sp>
-        <p:nvSpPr>
-          <p:cNvPr id="2" name="Slide Image Placeholder 1"/>
-          <p:cNvSpPr>
-            <a:spLocks noGrp="1"/>
-          </p:cNvSpPr>
-          <p:nvPr>
-            <p:ph type="sldImg" idx="2"/>
-          </p:nvPr>
-        </p:nvSpPr>
-        <p:spPr/>
-      </p:sp>
-      <p:sp>
-        <p:nvSpPr>
-          <p:cNvPr id="3" name="Notes Placeholder 2"/>
-          <p:cNvSpPr>
-            <a:spLocks noGrp="1"/>
-          </p:cNvSpPr>
-          <p:nvPr>
-            <p:ph type="body" idx="3" sz="quarter"/>
-          </p:nvPr>
-        </p:nvSpPr>
-        <p:spPr/>
-        <p:txBody>
-          <a:bodyPr/>
-          <a:lstStyle/>
-          <a:p>
-            <a:r>
-              <a:t>Mark the wrap done when you can name every pass in order.</a:t>
+              <a:t>Continue to OpenROAD or OpenLane when you are ready for place and route evidence.</a:t>
             </a:r>
           </a:p>
         </p:txBody>
@@ -3900,7 +3829,7 @@
                 </a:solidFill>
                 <a:latin typeface="Calibri"/>
               </a:rPr>
-              <a:t>Wrap</a:t>
+              <a:t>Path complete</a:t>
             </a:r>
           </a:p>
           <a:p>
@@ -3919,7 +3848,7 @@
                 </a:solidFill>
                 <a:latin typeface="Calibri"/>
               </a:rPr>
-              <a:t>You checked tiny_yosys: 6 RTL cells; flatten→1; opt→5; strash→4; rewrite→3; nand 6/7; report 7/11; engine ok</a:t>
+              <a:t>You finished Part A pass map, Part B real Yosys evidence on tiny_and_or.v, and Part C algorithms bound to real Yosys</a:t>
             </a:r>
           </a:p>
         </p:txBody>
@@ -4015,7 +3944,7 @@
                 </a:solidFill>
                 <a:latin typeface="Calibri"/>
               </a:rPr>
-              <a:t>The idea</a:t>
+              <a:t>What you can do</a:t>
             </a:r>
           </a:p>
         </p:txBody>
@@ -4060,7 +3989,7 @@
                 </a:solidFill>
                 <a:latin typeface="Calibri"/>
               </a:rPr>
-              <a:t>Natural next: learn_openroad (place/route evidence)</a:t>
+              <a:t>You can name the pass map, run real Yosys scripts</a:t>
             </a:r>
           </a:p>
         </p:txBody>
@@ -4156,7 +4085,7 @@
                 </a:solidFill>
                 <a:latin typeface="Calibri"/>
               </a:rPr>
-              <a:t>Recap</a:t>
+              <a:t>Evidence</a:t>
             </a:r>
           </a:p>
         </p:txBody>
@@ -4201,7 +4130,7 @@
                 </a:solidFill>
                 <a:latin typeface="Calibri"/>
               </a:rPr>
-              <a:t>Recap proc, flatten, opt, strash, rewrite, techmap, synth, engine</a:t>
+              <a:t>Checked-in logs and goldens under common/logs and common/evidence</a:t>
             </a:r>
           </a:p>
         </p:txBody>
@@ -4297,7 +4226,7 @@
                 </a:solidFill>
                 <a:latin typeface="Calibri"/>
               </a:rPr>
-              <a:t>Goldens</a:t>
+              <a:t>Three layers</a:t>
             </a:r>
           </a:p>
         </p:txBody>
@@ -4342,7 +4271,51 @@
                 </a:solidFill>
                 <a:latin typeface="Calibri"/>
               </a:rPr>
-              <a:t>6 RTL cells; flatten→1; opt→5; strash→4; rewrite→3; nand 6/7; report 7/11; engine ok</a:t>
+              <a:t>Pass-map labs teach the pass order</a:t>
+            </a:r>
+          </a:p>
+          <a:p>
+            <a:pPr lvl="0" marL="457200" indent="-228600">
+              <a:buFont typeface="Calibri"/>
+              <a:spcAft>
+                <a:spcPts val="1000"/>
+              </a:spcAft>
+              <a:buSzPct val="100000"/>
+              <a:buChar char="•"/>
+              <a:lnSpc>
+                <a:spcPts val="2200"/>
+              </a:lnSpc>
+            </a:pPr>
+            <a:r>
+              <a:rPr sz="2000" b="0">
+                <a:solidFill>
+                  <a:srgbClr val="333333"/>
+                </a:solidFill>
+                <a:latin typeface="Calibri"/>
+              </a:rPr>
+              <a:t>Real modules teach the CLI, RTLIL, and evidence</a:t>
+            </a:r>
+          </a:p>
+          <a:p>
+            <a:pPr lvl="0" marL="457200" indent="-228600">
+              <a:buFont typeface="Calibri"/>
+              <a:spcAft>
+                <a:spcPts val="1000"/>
+              </a:spcAft>
+              <a:buSzPct val="100000"/>
+              <a:buChar char="•"/>
+              <a:lnSpc>
+                <a:spcPts val="2200"/>
+              </a:lnSpc>
+            </a:pPr>
+            <a:r>
+              <a:rPr sz="2000" b="0">
+                <a:solidFill>
+                  <a:srgbClr val="333333"/>
+                </a:solidFill>
+                <a:latin typeface="Calibri"/>
+              </a:rPr>
+              <a:t>Algorithm labs teach the moves and bind them to Yosys</a:t>
             </a:r>
           </a:p>
         </p:txBody>
@@ -4505,148 +4478,7 @@
                 </a:solidFill>
                 <a:latin typeface="Calibri"/>
               </a:rPr>
-              <a:t>Natural next: learn_openroad (place/route evidence)</a:t>
-            </a:r>
-          </a:p>
-        </p:txBody>
-      </p:sp>
-      <p:sp>
-        <p:nvSpPr>
-          <p:cNvPr id="4" name="TextBox 3"/>
-          <p:cNvSpPr txBox="1"/>
-          <p:nvPr/>
-        </p:nvSpPr>
-        <p:spPr>
-          <a:xfrm>
-            <a:off x="548640" y="6355080"/>
-            <a:ext cx="11064240" cy="320040"/>
-          </a:xfrm>
-          <a:prstGeom prst="rect">
-            <a:avLst/>
-          </a:prstGeom>
-          <a:noFill/>
-        </p:spPr>
-        <p:txBody>
-          <a:bodyPr wrap="square">
-            <a:noAutofit/>
-          </a:bodyPr>
-          <a:lstStyle/>
-          <a:p>
-            <a:pPr algn="r">
-              <a:lnSpc>
-                <a:spcPts val="2200"/>
-              </a:lnSpc>
-              <a:defRPr sz="1000" b="0">
-                <a:solidFill>
-                  <a:srgbClr val="666666"/>
-                </a:solidFill>
-                <a:latin typeface="Calibri"/>
-              </a:defRPr>
-            </a:pPr>
-            <a:r>
-              <a:t>learn_yosys — 00 wrap</a:t>
-            </a:r>
-          </a:p>
-        </p:txBody>
-      </p:sp>
-    </p:spTree>
-  </p:cSld>
-  <p:clrMapOvr>
-    <a:masterClrMapping/>
-  </p:clrMapOvr>
-</p:sld>
-</file>
-
-<file path=ppt/slides/slide6.xml><?xml version="1.0" encoding="utf-8"?>
-<p:sld xmlns:a="http://schemas.openxmlformats.org/drawingml/2006/main" xmlns:p="http://schemas.openxmlformats.org/presentationml/2006/main" xmlns:r="http://schemas.openxmlformats.org/officeDocument/2006/relationships">
-  <p:cSld>
-    <p:spTree>
-      <p:nvGrpSpPr>
-        <p:cNvPr id="1" name=""/>
-        <p:cNvGrpSpPr/>
-        <p:nvPr/>
-      </p:nvGrpSpPr>
-      <p:grpSpPr/>
-      <p:sp>
-        <p:nvSpPr>
-          <p:cNvPr id="2" name="TextBox 1"/>
-          <p:cNvSpPr txBox="1"/>
-          <p:nvPr/>
-        </p:nvSpPr>
-        <p:spPr>
-          <a:xfrm>
-            <a:off x="548640" y="411480"/>
-            <a:ext cx="11064240" cy="777240"/>
-          </a:xfrm>
-          <a:prstGeom prst="rect">
-            <a:avLst/>
-          </a:prstGeom>
-          <a:noFill/>
-        </p:spPr>
-        <p:txBody>
-          <a:bodyPr wrap="square">
-            <a:noAutofit/>
-          </a:bodyPr>
-          <a:lstStyle/>
-          <a:p>
-            <a:pPr>
-              <a:lnSpc>
-                <a:spcPts val="2200"/>
-              </a:lnSpc>
-            </a:pPr>
-            <a:r>
-              <a:rPr sz="2800" b="1">
-                <a:solidFill>
-                  <a:srgbClr val="1A1A2E"/>
-                </a:solidFill>
-                <a:latin typeface="Calibri"/>
-              </a:rPr>
-              <a:t>Close</a:t>
-            </a:r>
-          </a:p>
-        </p:txBody>
-      </p:sp>
-      <p:sp>
-        <p:nvSpPr>
-          <p:cNvPr id="3" name="TextBox 2"/>
-          <p:cNvSpPr txBox="1"/>
-          <p:nvPr/>
-        </p:nvSpPr>
-        <p:spPr>
-          <a:xfrm>
-            <a:off x="548640" y="1234440"/>
-            <a:ext cx="11064240" cy="4937760"/>
-          </a:xfrm>
-          <a:prstGeom prst="rect">
-            <a:avLst/>
-          </a:prstGeom>
-          <a:noFill/>
-        </p:spPr>
-        <p:txBody>
-          <a:bodyPr wrap="square">
-            <a:noAutofit/>
-          </a:bodyPr>
-          <a:lstStyle/>
-          <a:p>
-            <a:pPr lvl="0" marL="457200" indent="-228600">
-              <a:buFont typeface="Calibri"/>
-              <a:spcAft>
-                <a:spcPts val="1000"/>
-              </a:spcAft>
-              <a:buSzPct val="100000"/>
-              <a:buChar char="•"/>
-              <a:lnSpc>
-                <a:spcPts val="2200"/>
-              </a:lnSpc>
-            </a:pPr>
-            <a:r>
-              <a:rPr sz="2000" b="0">
-                <a:solidFill>
-                  <a:srgbClr val="333333"/>
-                </a:solidFill>
-                <a:latin typeface="Calibri"/>
-              </a:rPr>
-              <a:t>Mark the wrap done when you can name every pass in order</a:t>
+              <a:t>Continue to OpenROAD or OpenLane when you are ready for place and route evidence</a:t>
             </a:r>
           </a:p>
         </p:txBody>

--- a/courses/learn_yosys/module99-00-wrap/slides.pptx
+++ b/courses/learn_yosys/module99-00-wrap/slides.pptx
@@ -506,7 +506,7 @@
           <a:lstStyle/>
           <a:p>
             <a:r>
-              <a:t>You finished Part A pass map, Part B real Yosys evidence on tiny_and_or.v, and Part C algorithms bound to real Yosys.</a:t>
+              <a:t>You finished Part A pass map, Part B real Yosys evidence, Part C algorithms bound to Yosys, and Part D internals literacy.</a:t>
             </a:r>
           </a:p>
         </p:txBody>
@@ -576,7 +576,7 @@
           <a:lstStyle/>
           <a:p>
             <a:r>
-              <a:t>You can name the pass map, run real Yosys scripts, and explain the algorithms behind proc, opt, techmap, extract, memory, fsm, and ABC handoff.</a:t>
+              <a:t>You can name the pass map, run real Yosys scripts, explain the algorithms behind proc through ABC, and open the Yosys C++ tree with intent.</a:t>
             </a:r>
           </a:p>
         </p:txBody>
@@ -716,7 +716,7 @@
           <a:lstStyle/>
           <a:p>
             <a:r>
-              <a:t>Pass-map labs teach the pass order. Real modules teach the CLI, RTLIL, and evidence. Algorithm labs teach the moves and bind them to Yosys.</a:t>
+              <a:t>Pass-map labs teach order. Real modules teach CLI and RTLIL. Algorithm labs teach moves and bind them. Internals labs teach how to read and extend the C++ tree.</a:t>
             </a:r>
           </a:p>
         </p:txBody>
@@ -786,7 +786,7 @@
           <a:lstStyle/>
           <a:p>
             <a:r>
-              <a:t>Continue to OpenROAD or OpenLane when you are ready for place and route evidence.</a:t>
+              <a:t>Continue to OpenROAD or OpenLane when you are ready for place and route evidence — or clone YosysHQ/yosys and try a tiny pass stub.</a:t>
             </a:r>
           </a:p>
         </p:txBody>
@@ -3848,7 +3848,7 @@
                 </a:solidFill>
                 <a:latin typeface="Calibri"/>
               </a:rPr>
-              <a:t>You finished Part A pass map, Part B real Yosys evidence on tiny_and_or.v, and Part C algorithms bound to real Yosys</a:t>
+              <a:t>You finished Part A pass map, Part B real Yosys evidence, Part C algorithms bound to Yosys</a:t>
             </a:r>
           </a:p>
         </p:txBody>
@@ -3989,7 +3989,7 @@
                 </a:solidFill>
                 <a:latin typeface="Calibri"/>
               </a:rPr>
-              <a:t>You can name the pass map, run real Yosys scripts</a:t>
+              <a:t>Open the Yosys C++ tree with intent</a:t>
             </a:r>
           </a:p>
         </p:txBody>
@@ -4226,7 +4226,7 @@
                 </a:solidFill>
                 <a:latin typeface="Calibri"/>
               </a:rPr>
-              <a:t>Three layers</a:t>
+              <a:t>Four layers</a:t>
             </a:r>
           </a:p>
         </p:txBody>
@@ -4271,7 +4271,7 @@
                 </a:solidFill>
                 <a:latin typeface="Calibri"/>
               </a:rPr>
-              <a:t>Pass-map labs teach the pass order</a:t>
+              <a:t>Pass-map labs teach order</a:t>
             </a:r>
           </a:p>
           <a:p>
@@ -4293,7 +4293,7 @@
                 </a:solidFill>
                 <a:latin typeface="Calibri"/>
               </a:rPr>
-              <a:t>Real modules teach the CLI, RTLIL, and evidence</a:t>
+              <a:t>Real modules teach CLI and RTLIL</a:t>
             </a:r>
           </a:p>
           <a:p>
@@ -4315,7 +4315,29 @@
                 </a:solidFill>
                 <a:latin typeface="Calibri"/>
               </a:rPr>
-              <a:t>Algorithm labs teach the moves and bind them to Yosys</a:t>
+              <a:t>Algorithm labs teach moves and bind them</a:t>
+            </a:r>
+          </a:p>
+          <a:p>
+            <a:pPr lvl="0" marL="457200" indent="-228600">
+              <a:buFont typeface="Calibri"/>
+              <a:spcAft>
+                <a:spcPts val="1000"/>
+              </a:spcAft>
+              <a:buSzPct val="100000"/>
+              <a:buChar char="•"/>
+              <a:lnSpc>
+                <a:spcPts val="2200"/>
+              </a:lnSpc>
+            </a:pPr>
+            <a:r>
+              <a:rPr sz="2000" b="0">
+                <a:solidFill>
+                  <a:srgbClr val="333333"/>
+                </a:solidFill>
+                <a:latin typeface="Calibri"/>
+              </a:rPr>
+              <a:t>Internals labs teach how to read and extend the C++ tree</a:t>
             </a:r>
           </a:p>
         </p:txBody>
